--- a/generated/MSV_Evolution_Slides.pptx
+++ b/generated/MSV_Evolution_Slides.pptx
@@ -6607,8 +6607,8 @@
         </p:nvCxnSpPr>
         <p:spPr>
           <a:xfrm>
-            <a:off x="3154680" y="2240280.0"/>
-            <a:ext cx="320040" cy="0.0"/>
+            <a:off x="3154680" y="2240280"/>
+            <a:ext cx="320040" cy="0"/>
           </a:xfrm>
           <a:prstGeom prst="bentConnector3">
             <a:avLst/>
@@ -6701,8 +6701,8 @@
         </p:nvCxnSpPr>
         <p:spPr>
           <a:xfrm>
-            <a:off x="5257800" y="2240280.0"/>
-            <a:ext cx="320040" cy="0.0"/>
+            <a:off x="5257800" y="2240280"/>
+            <a:ext cx="320040" cy="0"/>
           </a:xfrm>
           <a:prstGeom prst="bentConnector3">
             <a:avLst/>
@@ -6795,8 +6795,8 @@
         </p:nvCxnSpPr>
         <p:spPr>
           <a:xfrm>
-            <a:off x="7360920" y="2240280.0"/>
-            <a:ext cx="320040" cy="0.0"/>
+            <a:off x="7360920" y="2240280"/>
+            <a:ext cx="320040" cy="0"/>
           </a:xfrm>
           <a:prstGeom prst="bentConnector3">
             <a:avLst/>
@@ -6889,8 +6889,8 @@
         </p:nvCxnSpPr>
         <p:spPr>
           <a:xfrm>
-            <a:off x="9464040" y="2240280.0"/>
-            <a:ext cx="320040" cy="0.0"/>
+            <a:off x="9464040" y="2240280"/>
+            <a:ext cx="320040" cy="0"/>
           </a:xfrm>
           <a:prstGeom prst="bentConnector3">
             <a:avLst/>
@@ -14702,8 +14702,8 @@
         </p:nvCxnSpPr>
         <p:spPr>
           <a:xfrm>
-            <a:off x="3154680" y="2240280.0"/>
-            <a:ext cx="320040" cy="0.0"/>
+            <a:off x="3154680" y="2240280"/>
+            <a:ext cx="320040" cy="0"/>
           </a:xfrm>
           <a:prstGeom prst="bentConnector3">
             <a:avLst/>
@@ -14796,8 +14796,8 @@
         </p:nvCxnSpPr>
         <p:spPr>
           <a:xfrm>
-            <a:off x="5257800" y="2240280.0"/>
-            <a:ext cx="320040" cy="0.0"/>
+            <a:off x="5257800" y="2240280"/>
+            <a:ext cx="320040" cy="0"/>
           </a:xfrm>
           <a:prstGeom prst="bentConnector3">
             <a:avLst/>
@@ -14890,8 +14890,8 @@
         </p:nvCxnSpPr>
         <p:spPr>
           <a:xfrm>
-            <a:off x="7360920" y="2240280.0"/>
-            <a:ext cx="320040" cy="0.0"/>
+            <a:off x="7360920" y="2240280"/>
+            <a:ext cx="320040" cy="0"/>
           </a:xfrm>
           <a:prstGeom prst="bentConnector3">
             <a:avLst/>
@@ -14984,8 +14984,8 @@
         </p:nvCxnSpPr>
         <p:spPr>
           <a:xfrm>
-            <a:off x="9464040" y="2240280.0"/>
-            <a:ext cx="320040" cy="0.0"/>
+            <a:off x="9464040" y="2240280"/>
+            <a:ext cx="320040" cy="0"/>
           </a:xfrm>
           <a:prstGeom prst="bentConnector3">
             <a:avLst/>
